--- a/presentation/Churn_Prediction_Presentation.pptx
+++ b/presentation/Churn_Prediction_Presentation.pptx
@@ -4038,8 +4038,8 @@
         </p:blipFill>
         <p:spPr>
           <a:xfrm>
-            <a:off x="457200" y="2430780"/>
-            <a:ext cx="3291840" cy="2453640"/>
+            <a:off x="457200" y="2430134"/>
+            <a:ext cx="3291840" cy="2454931"/>
           </a:xfrm>
           <a:prstGeom prst="rect">
             <a:avLst/>
@@ -4062,8 +4062,8 @@
         </p:blipFill>
         <p:spPr>
           <a:xfrm>
-            <a:off x="3931920" y="2243440"/>
-            <a:ext cx="7772399" cy="2828320"/>
+            <a:off x="3931920" y="2241698"/>
+            <a:ext cx="7772400" cy="2831804"/>
           </a:xfrm>
           <a:prstGeom prst="rect">
             <a:avLst/>
@@ -4995,7 +4995,7 @@
                 </a:solidFill>
                 <a:latin typeface="Calibri"/>
               </a:rPr>
-              <a:t>Champion model: XGBoost (Tuned)  |  ROC-AUC 0.845  |  Recall 81.5%</a:t>
+              <a:t>Champion model: XGBoost (Tuned)  |  ROC-AUC 0.846  |  Recall 81.5%</a:t>
             </a:r>
           </a:p>
         </p:txBody>
@@ -5026,7 +5026,7 @@
                 <a:gridCol w="1005840"/>
                 <a:gridCol w="1005840"/>
               </a:tblGrid>
-              <a:tr h="400050">
+              <a:tr h="320040">
                 <a:tc>
                   <a:txBody>
                     <a:bodyPr/>
@@ -5160,7 +5160,7 @@
                   </a:tcPr>
                 </a:tc>
               </a:tr>
-              <a:tr h="400050">
+              <a:tr h="320040">
                 <a:tc>
                   <a:txBody>
                     <a:bodyPr/>
@@ -5195,7 +5195,7 @@
                             <a:srgbClr val="404040"/>
                           </a:solidFill>
                         </a:rPr>
-                        <a:t>0.7424</a:t>
+                        <a:t>0.7410</a:t>
                       </a:r>
                     </a:p>
                   </a:txBody>
@@ -5217,7 +5217,7 @@
                             <a:srgbClr val="404040"/>
                           </a:solidFill>
                         </a:rPr>
-                        <a:t>0.5092</a:t>
+                        <a:t>0.5075</a:t>
                       </a:r>
                     </a:p>
                   </a:txBody>
@@ -5261,7 +5261,7 @@
                             <a:srgbClr val="404040"/>
                           </a:solidFill>
                         </a:rPr>
-                        <a:t>0.6269</a:t>
+                        <a:t>0.6256</a:t>
                       </a:r>
                     </a:p>
                   </a:txBody>
@@ -5283,7 +5283,7 @@
                             <a:srgbClr val="404040"/>
                           </a:solidFill>
                         </a:rPr>
-                        <a:t>0.8454</a:t>
+                        <a:t>0.8456</a:t>
                       </a:r>
                     </a:p>
                   </a:txBody>
@@ -5294,7 +5294,141 @@
                   </a:tcPr>
                 </a:tc>
               </a:tr>
-              <a:tr h="400050">
+              <a:tr h="320040">
+                <a:tc>
+                  <a:txBody>
+                    <a:bodyPr/>
+                    <a:lstStyle/>
+                    <a:p>
+                      <a:pPr algn="l"/>
+                      <a:r>
+                        <a:rPr sz="1050" b="0">
+                          <a:solidFill>
+                            <a:srgbClr val="404040"/>
+                          </a:solidFill>
+                        </a:rPr>
+                        <a:t>Gradient Boosting</a:t>
+                      </a:r>
+                    </a:p>
+                  </a:txBody>
+                  <a:tcPr>
+                    <a:solidFill>
+                      <a:srgbClr val="FFFFFF"/>
+                    </a:solidFill>
+                  </a:tcPr>
+                </a:tc>
+                <a:tc>
+                  <a:txBody>
+                    <a:bodyPr/>
+                    <a:lstStyle/>
+                    <a:p>
+                      <a:pPr algn="ctr"/>
+                      <a:r>
+                        <a:rPr sz="1050" b="0">
+                          <a:solidFill>
+                            <a:srgbClr val="404040"/>
+                          </a:solidFill>
+                        </a:rPr>
+                        <a:t>0.8013</a:t>
+                      </a:r>
+                    </a:p>
+                  </a:txBody>
+                  <a:tcPr>
+                    <a:solidFill>
+                      <a:srgbClr val="FFFFFF"/>
+                    </a:solidFill>
+                  </a:tcPr>
+                </a:tc>
+                <a:tc>
+                  <a:txBody>
+                    <a:bodyPr/>
+                    <a:lstStyle/>
+                    <a:p>
+                      <a:pPr algn="ctr"/>
+                      <a:r>
+                        <a:rPr sz="1050" b="0">
+                          <a:solidFill>
+                            <a:srgbClr val="404040"/>
+                          </a:solidFill>
+                        </a:rPr>
+                        <a:t>0.6577</a:t>
+                      </a:r>
+                    </a:p>
+                  </a:txBody>
+                  <a:tcPr>
+                    <a:solidFill>
+                      <a:srgbClr val="FFFFFF"/>
+                    </a:solidFill>
+                  </a:tcPr>
+                </a:tc>
+                <a:tc>
+                  <a:txBody>
+                    <a:bodyPr/>
+                    <a:lstStyle/>
+                    <a:p>
+                      <a:pPr algn="ctr"/>
+                      <a:r>
+                        <a:rPr sz="1050" b="0">
+                          <a:solidFill>
+                            <a:srgbClr val="404040"/>
+                          </a:solidFill>
+                        </a:rPr>
+                        <a:t>0.5241</a:t>
+                      </a:r>
+                    </a:p>
+                  </a:txBody>
+                  <a:tcPr>
+                    <a:solidFill>
+                      <a:srgbClr val="FFFFFF"/>
+                    </a:solidFill>
+                  </a:tcPr>
+                </a:tc>
+                <a:tc>
+                  <a:txBody>
+                    <a:bodyPr/>
+                    <a:lstStyle/>
+                    <a:p>
+                      <a:pPr algn="ctr"/>
+                      <a:r>
+                        <a:rPr sz="1050" b="0">
+                          <a:solidFill>
+                            <a:srgbClr val="404040"/>
+                          </a:solidFill>
+                        </a:rPr>
+                        <a:t>0.5833</a:t>
+                      </a:r>
+                    </a:p>
+                  </a:txBody>
+                  <a:tcPr>
+                    <a:solidFill>
+                      <a:srgbClr val="FFFFFF"/>
+                    </a:solidFill>
+                  </a:tcPr>
+                </a:tc>
+                <a:tc>
+                  <a:txBody>
+                    <a:bodyPr/>
+                    <a:lstStyle/>
+                    <a:p>
+                      <a:pPr algn="ctr"/>
+                      <a:r>
+                        <a:rPr sz="1050" b="0">
+                          <a:solidFill>
+                            <a:srgbClr val="404040"/>
+                          </a:solidFill>
+                        </a:rPr>
+                        <a:t>0.8447</a:t>
+                      </a:r>
+                    </a:p>
+                  </a:txBody>
+                  <a:tcPr>
+                    <a:solidFill>
+                      <a:srgbClr val="FFFFFF"/>
+                    </a:solidFill>
+                  </a:tcPr>
+                </a:tc>
+              </a:tr>
+              <a:tr h="320040">
                 <a:tc>
                   <a:txBody>
                     <a:bodyPr/>
@@ -5329,7 +5463,7 @@
                             <a:srgbClr val="404040"/>
                           </a:solidFill>
                         </a:rPr>
-                        <a:t>0.7587</a:t>
+                        <a:t>0.7516</a:t>
                       </a:r>
                     </a:p>
                   </a:txBody>
@@ -5351,7 +5485,7 @@
                             <a:srgbClr val="404040"/>
                           </a:solidFill>
                         </a:rPr>
-                        <a:t>0.5311</a:t>
+                        <a:t>0.5212</a:t>
                       </a:r>
                     </a:p>
                   </a:txBody>
@@ -5373,7 +5507,7 @@
                             <a:srgbClr val="404040"/>
                           </a:solidFill>
                         </a:rPr>
-                        <a:t>0.7754</a:t>
+                        <a:t>0.7888</a:t>
                       </a:r>
                     </a:p>
                   </a:txBody>
@@ -5395,7 +5529,7 @@
                             <a:srgbClr val="404040"/>
                           </a:solidFill>
                         </a:rPr>
-                        <a:t>0.6304</a:t>
+                        <a:t>0.6277</a:t>
                       </a:r>
                     </a:p>
                   </a:txBody>
@@ -5417,7 +5551,7 @@
                             <a:srgbClr val="404040"/>
                           </a:solidFill>
                         </a:rPr>
-                        <a:t>0.8442</a:t>
+                        <a:t>0.8436</a:t>
                       </a:r>
                     </a:p>
                   </a:txBody>
@@ -5428,7 +5562,7 @@
                   </a:tcPr>
                 </a:tc>
               </a:tr>
-              <a:tr h="400050">
+              <a:tr h="320040">
                 <a:tc>
                   <a:txBody>
                     <a:bodyPr/>
@@ -5562,7 +5696,141 @@
                   </a:tcPr>
                 </a:tc>
               </a:tr>
-              <a:tr h="400050">
+              <a:tr h="320040">
+                <a:tc>
+                  <a:txBody>
+                    <a:bodyPr/>
+                    <a:lstStyle/>
+                    <a:p>
+                      <a:pPr algn="l"/>
+                      <a:r>
+                        <a:rPr sz="1050" b="0">
+                          <a:solidFill>
+                            <a:srgbClr val="404040"/>
+                          </a:solidFill>
+                        </a:rPr>
+                        <a:t>Decision Tree (GridSearchCV)</a:t>
+                      </a:r>
+                    </a:p>
+                  </a:txBody>
+                  <a:tcPr>
+                    <a:solidFill>
+                      <a:srgbClr val="FFFFFF"/>
+                    </a:solidFill>
+                  </a:tcPr>
+                </a:tc>
+                <a:tc>
+                  <a:txBody>
+                    <a:bodyPr/>
+                    <a:lstStyle/>
+                    <a:p>
+                      <a:pPr algn="ctr"/>
+                      <a:r>
+                        <a:rPr sz="1050" b="0">
+                          <a:solidFill>
+                            <a:srgbClr val="404040"/>
+                          </a:solidFill>
+                        </a:rPr>
+                        <a:t>0.7942</a:t>
+                      </a:r>
+                    </a:p>
+                  </a:txBody>
+                  <a:tcPr>
+                    <a:solidFill>
+                      <a:srgbClr val="FFFFFF"/>
+                    </a:solidFill>
+                  </a:tcPr>
+                </a:tc>
+                <a:tc>
+                  <a:txBody>
+                    <a:bodyPr/>
+                    <a:lstStyle/>
+                    <a:p>
+                      <a:pPr algn="ctr"/>
+                      <a:r>
+                        <a:rPr sz="1050" b="0">
+                          <a:solidFill>
+                            <a:srgbClr val="404040"/>
+                          </a:solidFill>
+                        </a:rPr>
+                        <a:t>0.6312</a:t>
+                      </a:r>
+                    </a:p>
+                  </a:txBody>
+                  <a:tcPr>
+                    <a:solidFill>
+                      <a:srgbClr val="FFFFFF"/>
+                    </a:solidFill>
+                  </a:tcPr>
+                </a:tc>
+                <a:tc>
+                  <a:txBody>
+                    <a:bodyPr/>
+                    <a:lstStyle/>
+                    <a:p>
+                      <a:pPr algn="ctr"/>
+                      <a:r>
+                        <a:rPr sz="1050" b="0">
+                          <a:solidFill>
+                            <a:srgbClr val="404040"/>
+                          </a:solidFill>
+                        </a:rPr>
+                        <a:t>0.5401</a:t>
+                      </a:r>
+                    </a:p>
+                  </a:txBody>
+                  <a:tcPr>
+                    <a:solidFill>
+                      <a:srgbClr val="FFFFFF"/>
+                    </a:solidFill>
+                  </a:tcPr>
+                </a:tc>
+                <a:tc>
+                  <a:txBody>
+                    <a:bodyPr/>
+                    <a:lstStyle/>
+                    <a:p>
+                      <a:pPr algn="ctr"/>
+                      <a:r>
+                        <a:rPr sz="1050" b="0">
+                          <a:solidFill>
+                            <a:srgbClr val="404040"/>
+                          </a:solidFill>
+                        </a:rPr>
+                        <a:t>0.5821</a:t>
+                      </a:r>
+                    </a:p>
+                  </a:txBody>
+                  <a:tcPr>
+                    <a:solidFill>
+                      <a:srgbClr val="FFFFFF"/>
+                    </a:solidFill>
+                  </a:tcPr>
+                </a:tc>
+                <a:tc>
+                  <a:txBody>
+                    <a:bodyPr/>
+                    <a:lstStyle/>
+                    <a:p>
+                      <a:pPr algn="ctr"/>
+                      <a:r>
+                        <a:rPr sz="1050" b="0">
+                          <a:solidFill>
+                            <a:srgbClr val="404040"/>
+                          </a:solidFill>
+                        </a:rPr>
+                        <a:t>0.8267</a:t>
+                      </a:r>
+                    </a:p>
+                  </a:txBody>
+                  <a:tcPr>
+                    <a:solidFill>
+                      <a:srgbClr val="FFFFFF"/>
+                    </a:solidFill>
+                  </a:tcPr>
+                </a:tc>
+              </a:tr>
+              <a:tr h="320040">
                 <a:tc>
                   <a:txBody>
                     <a:bodyPr/>
@@ -5696,7 +5964,7 @@
                   </a:tcPr>
                 </a:tc>
               </a:tr>
-              <a:tr h="400050">
+              <a:tr h="320040">
                 <a:tc>
                   <a:txBody>
                     <a:bodyPr/>
@@ -5830,7 +6098,7 @@
                   </a:tcPr>
                 </a:tc>
               </a:tr>
-              <a:tr h="400050">
+              <a:tr h="320040">
                 <a:tc>
                   <a:txBody>
                     <a:bodyPr/>
@@ -5865,7 +6133,7 @@
                             <a:srgbClr val="404040"/>
                           </a:solidFill>
                         </a:rPr>
-                        <a:t>0.7722</a:t>
+                        <a:t>0.7708</a:t>
                       </a:r>
                     </a:p>
                   </a:txBody>
@@ -5887,7 +6155,7 @@
                             <a:srgbClr val="404040"/>
                           </a:solidFill>
                         </a:rPr>
-                        <a:t>0.5810</a:t>
+                        <a:t>0.5780</a:t>
                       </a:r>
                     </a:p>
                   </a:txBody>
@@ -5909,7 +6177,7 @@
                             <a:srgbClr val="404040"/>
                           </a:solidFill>
                         </a:rPr>
-                        <a:t>0.5080</a:t>
+                        <a:t>0.5053</a:t>
                       </a:r>
                     </a:p>
                   </a:txBody>
@@ -5931,7 +6199,7 @@
                             <a:srgbClr val="404040"/>
                           </a:solidFill>
                         </a:rPr>
-                        <a:t>0.5421</a:t>
+                        <a:t>0.5392</a:t>
                       </a:r>
                     </a:p>
                   </a:txBody>
@@ -5953,7 +6221,7 @@
                             <a:srgbClr val="404040"/>
                           </a:solidFill>
                         </a:rPr>
-                        <a:t>0.8102</a:t>
+                        <a:t>0.8120</a:t>
                       </a:r>
                     </a:p>
                   </a:txBody>
@@ -5964,7 +6232,7 @@
                   </a:tcPr>
                 </a:tc>
               </a:tr>
-              <a:tr h="400050">
+              <a:tr h="320040">
                 <a:tc>
                   <a:txBody>
                     <a:bodyPr/>
@@ -6118,8 +6386,8 @@
         </p:blipFill>
         <p:spPr>
           <a:xfrm>
-            <a:off x="7259688" y="1463040"/>
-            <a:ext cx="3951504" cy="3383279"/>
+            <a:off x="7257081" y="1463040"/>
+            <a:ext cx="3956717" cy="3383279"/>
           </a:xfrm>
           <a:prstGeom prst="rect">
             <a:avLst/>
@@ -7053,7 +7321,7 @@
                 </a:solidFill>
                 <a:latin typeface="Calibri"/>
               </a:rPr>
-              <a:t>ROC-AUC of 0.845 and Recall of 81.5% on held-out data, correctly identifying roughly 4 in 5 at-risk customers.</a:t>
+              <a:t>ROC-AUC of 0.846 and Recall of 81.5% on held-out data, correctly identifying roughly 4 in 5 at-risk customers.</a:t>
             </a:r>
           </a:p>
           <a:p>
